--- a/Управление IT-сервисами (Кузнецова)/Практическая 2.pptx
+++ b/Управление IT-сервисами (Кузнецова)/Практическая 2.pptx
@@ -6,11 +6,12 @@
   </p:sldMasterIdLst>
   <p:sldIdLst>
     <p:sldId id="256" r:id="rId2"/>
-    <p:sldId id="257" r:id="rId3"/>
-    <p:sldId id="258" r:id="rId4"/>
+    <p:sldId id="258" r:id="rId3"/>
+    <p:sldId id="257" r:id="rId4"/>
     <p:sldId id="259" r:id="rId5"/>
     <p:sldId id="260" r:id="rId6"/>
     <p:sldId id="261" r:id="rId7"/>
+    <p:sldId id="262" r:id="rId8"/>
   </p:sldIdLst>
   <p:sldSz cx="9144000" cy="6858000" type="screen4x3"/>
   <p:notesSz cx="6858000" cy="9144000"/>
@@ -314,7 +315,7 @@
           <a:p>
             <a:fld id="{5BCAD085-E8A6-8845-BD4E-CB4CCA059FC4}" type="datetimeFigureOut">
               <a:rPr lang="en-US" smtClean="0"/>
-              <a:t>4/20/2026</a:t>
+              <a:t>5/7/2026</a:t>
             </a:fld>
             <a:endParaRPr lang="en-US"/>
           </a:p>
@@ -589,7 +590,7 @@
           <a:p>
             <a:fld id="{5BCAD085-E8A6-8845-BD4E-CB4CCA059FC4}" type="datetimeFigureOut">
               <a:rPr lang="en-US" smtClean="0"/>
-              <a:t>4/20/2026</a:t>
+              <a:t>5/7/2026</a:t>
             </a:fld>
             <a:endParaRPr lang="en-US"/>
           </a:p>
@@ -783,7 +784,7 @@
           <a:p>
             <a:fld id="{5BCAD085-E8A6-8845-BD4E-CB4CCA059FC4}" type="datetimeFigureOut">
               <a:rPr lang="en-US" smtClean="0"/>
-              <a:t>4/20/2026</a:t>
+              <a:t>5/7/2026</a:t>
             </a:fld>
             <a:endParaRPr lang="en-US"/>
           </a:p>
@@ -1056,7 +1057,7 @@
           <a:p>
             <a:fld id="{5BCAD085-E8A6-8845-BD4E-CB4CCA059FC4}" type="datetimeFigureOut">
               <a:rPr lang="en-US" smtClean="0"/>
-              <a:t>4/20/2026</a:t>
+              <a:t>5/7/2026</a:t>
             </a:fld>
             <a:endParaRPr lang="en-US"/>
           </a:p>
@@ -1397,7 +1398,7 @@
           <a:p>
             <a:fld id="{5BCAD085-E8A6-8845-BD4E-CB4CCA059FC4}" type="datetimeFigureOut">
               <a:rPr lang="en-US" smtClean="0"/>
-              <a:t>4/20/2026</a:t>
+              <a:t>5/7/2026</a:t>
             </a:fld>
             <a:endParaRPr lang="en-US"/>
           </a:p>
@@ -2020,7 +2021,7 @@
           <a:p>
             <a:fld id="{5BCAD085-E8A6-8845-BD4E-CB4CCA059FC4}" type="datetimeFigureOut">
               <a:rPr lang="en-US" smtClean="0"/>
-              <a:t>4/20/2026</a:t>
+              <a:t>5/7/2026</a:t>
             </a:fld>
             <a:endParaRPr lang="en-US"/>
           </a:p>
@@ -2880,7 +2881,7 @@
           <a:p>
             <a:fld id="{5BCAD085-E8A6-8845-BD4E-CB4CCA059FC4}" type="datetimeFigureOut">
               <a:rPr lang="en-US" smtClean="0"/>
-              <a:t>4/20/2026</a:t>
+              <a:t>5/7/2026</a:t>
             </a:fld>
             <a:endParaRPr lang="en-US"/>
           </a:p>
@@ -3050,7 +3051,7 @@
           <a:p>
             <a:fld id="{5BCAD085-E8A6-8845-BD4E-CB4CCA059FC4}" type="datetimeFigureOut">
               <a:rPr lang="en-US" smtClean="0"/>
-              <a:t>4/20/2026</a:t>
+              <a:t>5/7/2026</a:t>
             </a:fld>
             <a:endParaRPr lang="en-US"/>
           </a:p>
@@ -3230,7 +3231,7 @@
           <a:p>
             <a:fld id="{5BCAD085-E8A6-8845-BD4E-CB4CCA059FC4}" type="datetimeFigureOut">
               <a:rPr lang="en-US" smtClean="0"/>
-              <a:t>4/20/2026</a:t>
+              <a:t>5/7/2026</a:t>
             </a:fld>
             <a:endParaRPr lang="en-US"/>
           </a:p>
@@ -3400,7 +3401,7 @@
           <a:p>
             <a:fld id="{5BCAD085-E8A6-8845-BD4E-CB4CCA059FC4}" type="datetimeFigureOut">
               <a:rPr lang="en-US" smtClean="0"/>
-              <a:t>4/20/2026</a:t>
+              <a:t>5/7/2026</a:t>
             </a:fld>
             <a:endParaRPr lang="en-US"/>
           </a:p>
@@ -3647,7 +3648,7 @@
           <a:p>
             <a:fld id="{5BCAD085-E8A6-8845-BD4E-CB4CCA059FC4}" type="datetimeFigureOut">
               <a:rPr lang="en-US" smtClean="0"/>
-              <a:t>4/20/2026</a:t>
+              <a:t>5/7/2026</a:t>
             </a:fld>
             <a:endParaRPr lang="en-US"/>
           </a:p>
@@ -3939,7 +3940,7 @@
           <a:p>
             <a:fld id="{5BCAD085-E8A6-8845-BD4E-CB4CCA059FC4}" type="datetimeFigureOut">
               <a:rPr lang="en-US" smtClean="0"/>
-              <a:t>4/20/2026</a:t>
+              <a:t>5/7/2026</a:t>
             </a:fld>
             <a:endParaRPr lang="en-US"/>
           </a:p>
@@ -4383,7 +4384,7 @@
           <a:p>
             <a:fld id="{5BCAD085-E8A6-8845-BD4E-CB4CCA059FC4}" type="datetimeFigureOut">
               <a:rPr lang="en-US" smtClean="0"/>
-              <a:t>4/20/2026</a:t>
+              <a:t>5/7/2026</a:t>
             </a:fld>
             <a:endParaRPr lang="en-US"/>
           </a:p>
@@ -4501,7 +4502,7 @@
           <a:p>
             <a:fld id="{5BCAD085-E8A6-8845-BD4E-CB4CCA059FC4}" type="datetimeFigureOut">
               <a:rPr lang="en-US" smtClean="0"/>
-              <a:t>4/20/2026</a:t>
+              <a:t>5/7/2026</a:t>
             </a:fld>
             <a:endParaRPr lang="en-US"/>
           </a:p>
@@ -4596,7 +4597,7 @@
           <a:p>
             <a:fld id="{5BCAD085-E8A6-8845-BD4E-CB4CCA059FC4}" type="datetimeFigureOut">
               <a:rPr lang="en-US" smtClean="0"/>
-              <a:t>4/20/2026</a:t>
+              <a:t>5/7/2026</a:t>
             </a:fld>
             <a:endParaRPr lang="en-US"/>
           </a:p>
@@ -4875,7 +4876,7 @@
           <a:p>
             <a:fld id="{5BCAD085-E8A6-8845-BD4E-CB4CCA059FC4}" type="datetimeFigureOut">
               <a:rPr lang="en-US" smtClean="0"/>
-              <a:t>4/20/2026</a:t>
+              <a:t>5/7/2026</a:t>
             </a:fld>
             <a:endParaRPr lang="en-US"/>
           </a:p>
@@ -5150,7 +5151,7 @@
           <a:p>
             <a:fld id="{5BCAD085-E8A6-8845-BD4E-CB4CCA059FC4}" type="datetimeFigureOut">
               <a:rPr lang="en-US" smtClean="0"/>
-              <a:t>4/20/2026</a:t>
+              <a:t>5/7/2026</a:t>
             </a:fld>
             <a:endParaRPr lang="en-US"/>
           </a:p>
@@ -5715,7 +5716,7 @@
           <a:p>
             <a:fld id="{5BCAD085-E8A6-8845-BD4E-CB4CCA059FC4}" type="datetimeFigureOut">
               <a:rPr lang="en-US" smtClean="0"/>
-              <a:t>4/20/2026</a:t>
+              <a:t>5/7/2026</a:t>
             </a:fld>
             <a:endParaRPr lang="en-US"/>
           </a:p>
@@ -6374,13 +6375,18 @@
             <p:ph type="title"/>
           </p:nvPr>
         </p:nvSpPr>
-        <p:spPr/>
+        <p:spPr>
+          <a:xfrm>
+            <a:off x="483974" y="552245"/>
+            <a:ext cx="7055380" cy="1400530"/>
+          </a:xfrm>
+        </p:spPr>
         <p:txBody>
           <a:bodyPr/>
           <a:lstStyle/>
           <a:p>
             <a:r>
-              <a:t>Суть идеи</a:t>
+              <a:t>Проблема</a:t>
             </a:r>
           </a:p>
         </p:txBody>
@@ -6395,29 +6401,35 @@
             <p:ph idx="1"/>
           </p:nvPr>
         </p:nvSpPr>
-        <p:spPr/>
+        <p:spPr>
+          <a:xfrm>
+            <a:off x="111967" y="1816550"/>
+            <a:ext cx="4870580" cy="4677556"/>
+          </a:xfrm>
+        </p:spPr>
         <p:txBody>
           <a:bodyPr/>
           <a:lstStyle/>
           <a:p>
-            <a:pPr marL="0" indent="0">
+            <a:pPr marL="0" indent="0" algn="just">
+              <a:lnSpc>
+                <a:spcPct val="150000"/>
+              </a:lnSpc>
               <a:buNone/>
             </a:pPr>
             <a:r>
               <a:rPr lang="ru-RU" dirty="0"/>
-              <a:t>	</a:t>
-            </a:r>
+              <a:t>	Международный туристический поток увеличивается с каждым годом. Туристам крайне сложно самостоятельно составлять удобные маршруты путешествий:</a:t>
+            </a:r>
+          </a:p>
+          <a:p>
+            <a:pPr marL="514350" indent="-514350">
+              <a:buFont typeface="+mj-lt"/>
+              <a:buAutoNum type="arabicPeriod"/>
+            </a:pPr>
             <a:r>
               <a:rPr dirty="0" err="1"/>
-              <a:t>SmartTravel</a:t>
-            </a:r>
-            <a:r>
-              <a:rPr dirty="0"/>
-              <a:t> Planner — </a:t>
-            </a:r>
-            <a:r>
-              <a:rPr dirty="0" err="1"/>
-              <a:t>это</a:t>
+              <a:t>Много</a:t>
             </a:r>
             <a:r>
               <a:rPr dirty="0"/>
@@ -6425,15 +6437,15 @@
             </a:r>
             <a:r>
               <a:rPr dirty="0" err="1"/>
-              <a:t>веб-приложение</a:t>
+              <a:t>информации</a:t>
             </a:r>
             <a:r>
               <a:rPr dirty="0"/>
-              <a:t>, </a:t>
+              <a:t> в </a:t>
             </a:r>
             <a:r>
               <a:rPr dirty="0" err="1"/>
-              <a:t>которое</a:t>
+              <a:t>разных</a:t>
             </a:r>
             <a:r>
               <a:rPr dirty="0"/>
@@ -6441,22 +6453,22 @@
             </a:r>
             <a:r>
               <a:rPr dirty="0" err="1"/>
-              <a:t>автоматически</a:t>
-            </a:r>
+              <a:t>источниках</a:t>
+            </a:r>
+            <a:r>
+              <a:rPr lang="en-US" dirty="0"/>
+              <a:t>.</a:t>
+            </a:r>
+            <a:endParaRPr dirty="0"/>
+          </a:p>
+          <a:p>
+            <a:pPr marL="514350" indent="-514350">
+              <a:buFont typeface="+mj-lt"/>
+              <a:buAutoNum type="arabicPeriod"/>
+            </a:pPr>
             <a:r>
               <a:rPr lang="ru-RU" dirty="0"/>
-              <a:t>:</a:t>
-            </a:r>
-            <a:endParaRPr dirty="0"/>
-          </a:p>
-          <a:p>
-            <a:r>
-              <a:rPr lang="ru-RU" dirty="0"/>
-              <a:t>С</a:t>
-            </a:r>
-            <a:r>
-              <a:rPr dirty="0" err="1"/>
-              <a:t>оздает</a:t>
+              <a:t>Невозможность</a:t>
             </a:r>
             <a:r>
               <a:rPr dirty="0"/>
@@ -6464,7 +6476,22 @@
             </a:r>
             <a:r>
               <a:rPr dirty="0" err="1"/>
-              <a:t>персонализированные</a:t>
+              <a:t>персонализации</a:t>
+            </a:r>
+            <a:r>
+              <a:rPr lang="en-US" dirty="0"/>
+              <a:t>.</a:t>
+            </a:r>
+            <a:endParaRPr dirty="0"/>
+          </a:p>
+          <a:p>
+            <a:pPr marL="514350" indent="-514350">
+              <a:buFont typeface="+mj-lt"/>
+              <a:buAutoNum type="arabicPeriod"/>
+            </a:pPr>
+            <a:r>
+              <a:rPr dirty="0" err="1"/>
+              <a:t>Трата</a:t>
             </a:r>
             <a:r>
               <a:rPr dirty="0"/>
@@ -6472,7 +6499,7 @@
             </a:r>
             <a:r>
               <a:rPr dirty="0" err="1"/>
-              <a:t>маршруты</a:t>
+              <a:t>времени</a:t>
             </a:r>
             <a:r>
               <a:rPr dirty="0"/>
@@ -6480,7 +6507,15 @@
             </a:r>
             <a:r>
               <a:rPr dirty="0" err="1"/>
-              <a:t>путешествий</a:t>
+              <a:t>на</a:t>
+            </a:r>
+            <a:r>
+              <a:rPr dirty="0"/>
+              <a:t> </a:t>
+            </a:r>
+            <a:r>
+              <a:rPr dirty="0" err="1"/>
+              <a:t>поиск</a:t>
             </a:r>
             <a:r>
               <a:rPr lang="en-US" dirty="0"/>
@@ -6488,58 +6523,55 @@
             </a:r>
             <a:endParaRPr dirty="0"/>
           </a:p>
-          <a:p>
-            <a:r>
-              <a:rPr lang="ru-RU" dirty="0"/>
-              <a:t>Н</a:t>
-            </a:r>
-            <a:r>
-              <a:rPr dirty="0"/>
-              <a:t>а </a:t>
-            </a:r>
-            <a:r>
-              <a:rPr dirty="0" err="1"/>
-              <a:t>основе</a:t>
-            </a:r>
-            <a:r>
-              <a:rPr dirty="0"/>
-              <a:t> </a:t>
-            </a:r>
-            <a:r>
-              <a:rPr dirty="0" err="1"/>
-              <a:t>интересов</a:t>
-            </a:r>
-            <a:r>
-              <a:rPr dirty="0"/>
-              <a:t>, </a:t>
-            </a:r>
-            <a:r>
-              <a:rPr dirty="0" err="1"/>
-              <a:t>бюджета</a:t>
-            </a:r>
-            <a:r>
-              <a:rPr dirty="0"/>
-              <a:t> и </a:t>
-            </a:r>
-            <a:r>
-              <a:rPr dirty="0" err="1"/>
-              <a:t>времени</a:t>
-            </a:r>
-            <a:r>
-              <a:rPr dirty="0"/>
-              <a:t> </a:t>
-            </a:r>
-            <a:r>
-              <a:rPr dirty="0" err="1"/>
-              <a:t>пользователя</a:t>
-            </a:r>
-            <a:r>
-              <a:rPr dirty="0"/>
-              <a:t>.</a:t>
-            </a:r>
-          </a:p>
-        </p:txBody>
-      </p:sp>
+        </p:txBody>
+      </p:sp>
+      <p:pic>
+        <p:nvPicPr>
+          <p:cNvPr id="1026" name="Picture 2" descr="Туристический поток по России за минувший год увеличился на 8%">
+            <a:extLst>
+              <a:ext uri="{FF2B5EF4-FFF2-40B4-BE49-F238E27FC236}">
+                <a16:creationId xmlns:a16="http://schemas.microsoft.com/office/drawing/2014/main" id="{39733351-BC21-401B-9155-13CA36EBC888}"/>
+              </a:ext>
+            </a:extLst>
+          </p:cNvPr>
+          <p:cNvPicPr>
+            <a:picLocks noChangeAspect="1" noChangeArrowheads="1"/>
+          </p:cNvPicPr>
+          <p:nvPr/>
+        </p:nvPicPr>
+        <p:blipFill>
+          <a:blip r:embed="rId2">
+            <a:extLst>
+              <a:ext uri="{28A0092B-C50C-407E-A947-70E740481C1C}">
+                <a14:useLocalDpi xmlns:a14="http://schemas.microsoft.com/office/drawing/2010/main" val="0"/>
+              </a:ext>
+            </a:extLst>
+          </a:blip>
+          <a:srcRect/>
+          <a:stretch>
+            <a:fillRect/>
+          </a:stretch>
+        </p:blipFill>
+        <p:spPr bwMode="auto">
+          <a:xfrm>
+            <a:off x="5249041" y="2539191"/>
+            <a:ext cx="3871882" cy="2238082"/>
+          </a:xfrm>
+          <a:prstGeom prst="rect">
+            <a:avLst/>
+          </a:prstGeom>
+          <a:noFill/>
+          <a:extLst>
+            <a:ext uri="{909E8E84-426E-40DD-AFC4-6F175D3DCCD1}">
+              <a14:hiddenFill xmlns:a14="http://schemas.microsoft.com/office/drawing/2010/main">
+                <a:solidFill>
+                  <a:srgbClr val="FFFFFF"/>
+                </a:solidFill>
+              </a14:hiddenFill>
+            </a:ext>
+          </a:extLst>
+        </p:spPr>
+      </p:pic>
     </p:spTree>
   </p:cSld>
   <p:clrMapOvr>
@@ -6581,33 +6613,8 @@
           <a:lstStyle/>
           <a:p>
             <a:r>
-              <a:t>Проблема</a:t>
-            </a:r>
-          </a:p>
-        </p:txBody>
-      </p:sp>
-      <p:sp>
-        <p:nvSpPr>
-          <p:cNvPr id="3" name="Content Placeholder 2"/>
-          <p:cNvSpPr>
-            <a:spLocks noGrp="1"/>
-          </p:cNvSpPr>
-          <p:nvPr>
-            <p:ph idx="1"/>
-          </p:nvPr>
-        </p:nvSpPr>
-        <p:spPr/>
-        <p:txBody>
-          <a:bodyPr/>
-          <a:lstStyle/>
-          <a:p>
-            <a:pPr marL="514350" indent="-514350">
-              <a:buFont typeface="+mj-lt"/>
-              <a:buAutoNum type="arabicPeriod"/>
-            </a:pPr>
-            <a:r>
               <a:rPr dirty="0" err="1"/>
-              <a:t>Сложно</a:t>
+              <a:t>Суть</a:t>
             </a:r>
             <a:r>
               <a:rPr dirty="0"/>
@@ -6615,7 +6622,55 @@
             </a:r>
             <a:r>
               <a:rPr dirty="0" err="1"/>
-              <a:t>планировать</a:t>
+              <a:t>идеи</a:t>
+            </a:r>
+            <a:endParaRPr dirty="0"/>
+          </a:p>
+        </p:txBody>
+      </p:sp>
+      <p:sp>
+        <p:nvSpPr>
+          <p:cNvPr id="3" name="Content Placeholder 2"/>
+          <p:cNvSpPr>
+            <a:spLocks noGrp="1"/>
+          </p:cNvSpPr>
+          <p:nvPr>
+            <p:ph idx="1"/>
+          </p:nvPr>
+        </p:nvSpPr>
+        <p:spPr>
+          <a:xfrm>
+            <a:off x="68810" y="2052925"/>
+            <a:ext cx="4832872" cy="4640234"/>
+          </a:xfrm>
+        </p:spPr>
+        <p:txBody>
+          <a:bodyPr>
+            <a:normAutofit fontScale="92500" lnSpcReduction="20000"/>
+          </a:bodyPr>
+          <a:lstStyle/>
+          <a:p>
+            <a:pPr marL="0" indent="0" algn="just">
+              <a:lnSpc>
+                <a:spcPct val="150000"/>
+              </a:lnSpc>
+              <a:buNone/>
+            </a:pPr>
+            <a:r>
+              <a:rPr lang="ru-RU" dirty="0"/>
+              <a:t>	</a:t>
+            </a:r>
+            <a:r>
+              <a:rPr dirty="0" err="1"/>
+              <a:t>SmartTravel</a:t>
+            </a:r>
+            <a:r>
+              <a:rPr dirty="0"/>
+              <a:t> Planner — </a:t>
+            </a:r>
+            <a:r>
+              <a:rPr dirty="0" err="1"/>
+              <a:t>это</a:t>
             </a:r>
             <a:r>
               <a:rPr dirty="0"/>
@@ -6623,22 +6678,15 @@
             </a:r>
             <a:r>
               <a:rPr dirty="0" err="1"/>
-              <a:t>поездки</a:t>
-            </a:r>
-            <a:r>
-              <a:rPr lang="en-US" dirty="0"/>
-              <a:t>.</a:t>
-            </a:r>
-            <a:endParaRPr dirty="0"/>
-          </a:p>
-          <a:p>
-            <a:pPr marL="514350" indent="-514350">
-              <a:buFont typeface="+mj-lt"/>
-              <a:buAutoNum type="arabicPeriod"/>
-            </a:pPr>
+              <a:t>веб-приложение</a:t>
+            </a:r>
+            <a:r>
+              <a:rPr dirty="0"/>
+              <a:t>, </a:t>
+            </a:r>
             <a:r>
               <a:rPr dirty="0" err="1"/>
-              <a:t>Много</a:t>
+              <a:t>которое</a:t>
             </a:r>
             <a:r>
               <a:rPr dirty="0"/>
@@ -6646,15 +6694,27 @@
             </a:r>
             <a:r>
               <a:rPr dirty="0" err="1"/>
-              <a:t>информации</a:t>
-            </a:r>
-            <a:r>
-              <a:rPr dirty="0"/>
-              <a:t> в </a:t>
+              <a:t>автоматически</a:t>
+            </a:r>
+            <a:r>
+              <a:rPr lang="ru-RU" dirty="0"/>
+              <a:t>:</a:t>
+            </a:r>
+            <a:endParaRPr dirty="0"/>
+          </a:p>
+          <a:p>
+            <a:pPr algn="just">
+              <a:lnSpc>
+                <a:spcPct val="150000"/>
+              </a:lnSpc>
+            </a:pPr>
+            <a:r>
+              <a:rPr lang="ru-RU" dirty="0"/>
+              <a:t>С</a:t>
             </a:r>
             <a:r>
               <a:rPr dirty="0" err="1"/>
-              <a:t>разных</a:t>
+              <a:t>оздает</a:t>
             </a:r>
             <a:r>
               <a:rPr dirty="0"/>
@@ -6662,45 +6722,39 @@
             </a:r>
             <a:r>
               <a:rPr dirty="0" err="1"/>
-              <a:t>источниках</a:t>
-            </a:r>
-            <a:r>
-              <a:rPr lang="en-US" dirty="0"/>
-              <a:t>.</a:t>
-            </a:r>
-            <a:endParaRPr dirty="0"/>
-          </a:p>
-          <a:p>
-            <a:pPr marL="514350" indent="-514350">
-              <a:buFont typeface="+mj-lt"/>
-              <a:buAutoNum type="arabicPeriod"/>
-            </a:pPr>
-            <a:r>
-              <a:rPr dirty="0" err="1"/>
-              <a:t>Нет</a:t>
+              <a:t>персонализированные</a:t>
+            </a:r>
+            <a:r>
+              <a:rPr lang="ru-RU" dirty="0"/>
+              <a:t> (оптимальные)</a:t>
             </a:r>
             <a:r>
               <a:rPr dirty="0"/>
               <a:t> </a:t>
             </a:r>
             <a:r>
+              <a:rPr lang="ru-RU" dirty="0"/>
+              <a:t>путешествия.</a:t>
+            </a:r>
+            <a:endParaRPr dirty="0"/>
+          </a:p>
+          <a:p>
+            <a:pPr algn="just">
+              <a:lnSpc>
+                <a:spcPct val="150000"/>
+              </a:lnSpc>
+            </a:pPr>
+            <a:r>
+              <a:rPr lang="ru-RU" dirty="0"/>
+              <a:t>Н</a:t>
+            </a:r>
+            <a:r>
+              <a:rPr dirty="0"/>
+              <a:t>а </a:t>
+            </a:r>
+            <a:r>
               <a:rPr dirty="0" err="1"/>
-              <a:t>персонализации</a:t>
-            </a:r>
-            <a:r>
-              <a:rPr lang="en-US" dirty="0"/>
-              <a:t>.</a:t>
-            </a:r>
-            <a:endParaRPr dirty="0"/>
-          </a:p>
-          <a:p>
-            <a:pPr marL="514350" indent="-514350">
-              <a:buFont typeface="+mj-lt"/>
-              <a:buAutoNum type="arabicPeriod"/>
-            </a:pPr>
-            <a:r>
-              <a:rPr dirty="0" err="1"/>
-              <a:t>Трата</a:t>
+              <a:t>основе</a:t>
             </a:r>
             <a:r>
               <a:rPr dirty="0"/>
@@ -6708,6 +6762,22 @@
             </a:r>
             <a:r>
               <a:rPr dirty="0" err="1"/>
+              <a:t>интересов</a:t>
+            </a:r>
+            <a:r>
+              <a:rPr dirty="0"/>
+              <a:t>, </a:t>
+            </a:r>
+            <a:r>
+              <a:rPr dirty="0" err="1"/>
+              <a:t>бюджета</a:t>
+            </a:r>
+            <a:r>
+              <a:rPr dirty="0"/>
+              <a:t> и </a:t>
+            </a:r>
+            <a:r>
+              <a:rPr dirty="0" err="1"/>
               <a:t>времени</a:t>
             </a:r>
             <a:r>
@@ -6716,24 +6786,87 @@
             </a:r>
             <a:r>
               <a:rPr dirty="0" err="1"/>
-              <a:t>на</a:t>
+              <a:t>пользователя</a:t>
             </a:r>
             <a:r>
               <a:rPr dirty="0"/>
-              <a:t> </a:t>
-            </a:r>
-            <a:r>
-              <a:rPr dirty="0" err="1"/>
-              <a:t>поиск</a:t>
-            </a:r>
-            <a:r>
-              <a:rPr lang="en-US" dirty="0"/>
               <a:t>.</a:t>
             </a:r>
+            <a:endParaRPr lang="ru-RU" dirty="0"/>
+          </a:p>
+          <a:p>
+            <a:pPr marL="0" indent="0" algn="just">
+              <a:lnSpc>
+                <a:spcPct val="150000"/>
+              </a:lnSpc>
+              <a:buNone/>
+            </a:pPr>
+            <a:r>
+              <a:rPr lang="ru-RU" i="1" dirty="0"/>
+              <a:t>	Целью</a:t>
+            </a:r>
+            <a:r>
+              <a:rPr lang="ru-RU" dirty="0"/>
+              <a:t> проекта является разработка программного продукта для быстрого и удобного планирования путешествий.</a:t>
+            </a:r>
+          </a:p>
+          <a:p>
+            <a:pPr>
+              <a:lnSpc>
+                <a:spcPct val="150000"/>
+              </a:lnSpc>
+            </a:pPr>
             <a:endParaRPr dirty="0"/>
           </a:p>
         </p:txBody>
       </p:sp>
+      <p:pic>
+        <p:nvPicPr>
+          <p:cNvPr id="2050" name="Picture 2" descr="Расходы, которые забывают учесть туристы при планировании путешествия">
+            <a:extLst>
+              <a:ext uri="{FF2B5EF4-FFF2-40B4-BE49-F238E27FC236}">
+                <a16:creationId xmlns:a16="http://schemas.microsoft.com/office/drawing/2014/main" id="{BFB51CE3-286A-4071-A9C1-6D84DCEFC6A5}"/>
+              </a:ext>
+            </a:extLst>
+          </p:cNvPr>
+          <p:cNvPicPr>
+            <a:picLocks noChangeAspect="1" noChangeArrowheads="1"/>
+          </p:cNvPicPr>
+          <p:nvPr/>
+        </p:nvPicPr>
+        <p:blipFill>
+          <a:blip r:embed="rId2">
+            <a:extLst>
+              <a:ext uri="{28A0092B-C50C-407E-A947-70E740481C1C}">
+                <a14:useLocalDpi xmlns:a14="http://schemas.microsoft.com/office/drawing/2010/main" val="0"/>
+              </a:ext>
+            </a:extLst>
+          </a:blip>
+          <a:srcRect/>
+          <a:stretch>
+            <a:fillRect/>
+          </a:stretch>
+        </p:blipFill>
+        <p:spPr bwMode="auto">
+          <a:xfrm>
+            <a:off x="5001208" y="2643672"/>
+            <a:ext cx="4129936" cy="2693437"/>
+          </a:xfrm>
+          <a:prstGeom prst="rect">
+            <a:avLst/>
+          </a:prstGeom>
+          <a:noFill/>
+          <a:extLst>
+            <a:ext uri="{909E8E84-426E-40DD-AFC4-6F175D3DCCD1}">
+              <a14:hiddenFill xmlns:a14="http://schemas.microsoft.com/office/drawing/2010/main">
+                <a:solidFill>
+                  <a:srgbClr val="FFFFFF"/>
+                </a:solidFill>
+              </a14:hiddenFill>
+            </a:ext>
+          </a:extLst>
+        </p:spPr>
+      </p:pic>
     </p:spTree>
   </p:cSld>
   <p:clrMapOvr>
@@ -6790,12 +6923,26 @@
             <p:ph idx="1"/>
           </p:nvPr>
         </p:nvSpPr>
-        <p:spPr/>
+        <p:spPr>
+          <a:xfrm>
+            <a:off x="242982" y="1766786"/>
+            <a:ext cx="4789328" cy="5007238"/>
+          </a:xfrm>
+        </p:spPr>
         <p:txBody>
           <a:bodyPr/>
           <a:lstStyle/>
           <a:p>
-            <a:pPr marL="514350" indent="-514350">
+            <a:pPr marL="0" indent="0">
+              <a:buNone/>
+            </a:pPr>
+            <a:r>
+              <a:rPr lang="ru-RU" dirty="0"/>
+              <a:t>	Готовый программный продукт должен решать следующие задачи:</a:t>
+            </a:r>
+          </a:p>
+          <a:p>
+            <a:pPr marL="857256" lvl="1" indent="-457200">
               <a:buFont typeface="+mj-lt"/>
               <a:buAutoNum type="arabicPeriod"/>
             </a:pPr>
@@ -6822,7 +6969,7 @@
             <a:endParaRPr lang="ru-RU" dirty="0"/>
           </a:p>
           <a:p>
-            <a:pPr marL="514350" indent="-514350">
+            <a:pPr marL="857256" lvl="1" indent="-457200">
               <a:buFont typeface="+mj-lt"/>
               <a:buAutoNum type="arabicPeriod"/>
             </a:pPr>
@@ -6853,7 +7000,7 @@
             <a:endParaRPr lang="ru-RU" dirty="0"/>
           </a:p>
           <a:p>
-            <a:pPr marL="514350" indent="-514350">
+            <a:pPr marL="857256" lvl="1" indent="-457200">
               <a:buFont typeface="+mj-lt"/>
               <a:buAutoNum type="arabicPeriod"/>
             </a:pPr>
@@ -6868,7 +7015,7 @@
             <a:endParaRPr lang="ru-RU" dirty="0"/>
           </a:p>
           <a:p>
-            <a:pPr marL="514350" indent="-514350">
+            <a:pPr marL="857256" lvl="1" indent="-457200">
               <a:buFont typeface="+mj-lt"/>
               <a:buAutoNum type="arabicPeriod"/>
             </a:pPr>
@@ -6908,6 +7055,53 @@
           </a:p>
         </p:txBody>
       </p:sp>
+      <p:pic>
+        <p:nvPicPr>
+          <p:cNvPr id="3074" name="Picture 2" descr="What is AI (artificial intelligence)? | Live Science">
+            <a:extLst>
+              <a:ext uri="{FF2B5EF4-FFF2-40B4-BE49-F238E27FC236}">
+                <a16:creationId xmlns:a16="http://schemas.microsoft.com/office/drawing/2014/main" id="{482A30D9-919E-4765-8D4C-7ABF3F3FAFD9}"/>
+              </a:ext>
+            </a:extLst>
+          </p:cNvPr>
+          <p:cNvPicPr>
+            <a:picLocks noChangeAspect="1" noChangeArrowheads="1"/>
+          </p:cNvPicPr>
+          <p:nvPr/>
+        </p:nvPicPr>
+        <p:blipFill>
+          <a:blip r:embed="rId2">
+            <a:extLst>
+              <a:ext uri="{28A0092B-C50C-407E-A947-70E740481C1C}">
+                <a14:useLocalDpi xmlns:a14="http://schemas.microsoft.com/office/drawing/2010/main" val="0"/>
+              </a:ext>
+            </a:extLst>
+          </a:blip>
+          <a:srcRect/>
+          <a:stretch>
+            <a:fillRect/>
+          </a:stretch>
+        </p:blipFill>
+        <p:spPr bwMode="auto">
+          <a:xfrm>
+            <a:off x="4923413" y="2076232"/>
+            <a:ext cx="3977605" cy="2237403"/>
+          </a:xfrm>
+          <a:prstGeom prst="rect">
+            <a:avLst/>
+          </a:prstGeom>
+          <a:noFill/>
+          <a:extLst>
+            <a:ext uri="{909E8E84-426E-40DD-AFC4-6F175D3DCCD1}">
+              <a14:hiddenFill xmlns:a14="http://schemas.microsoft.com/office/drawing/2010/main">
+                <a:solidFill>
+                  <a:srgbClr val="FFFFFF"/>
+                </a:solidFill>
+              </a14:hiddenFill>
+            </a:ext>
+          </a:extLst>
+        </p:spPr>
+      </p:pic>
     </p:spTree>
   </p:cSld>
   <p:clrMapOvr>
@@ -6964,10 +7158,25 @@
             <p:ph idx="1"/>
           </p:nvPr>
         </p:nvSpPr>
-        <p:spPr/>
+        <p:spPr>
+          <a:xfrm>
+            <a:off x="186998" y="2052925"/>
+            <a:ext cx="4590275" cy="4195481"/>
+          </a:xfrm>
+        </p:spPr>
         <p:txBody>
           <a:bodyPr/>
           <a:lstStyle/>
+          <a:p>
+            <a:pPr marL="0" indent="0">
+              <a:buNone/>
+            </a:pPr>
+            <a:r>
+              <a:rPr lang="ru-RU" dirty="0"/>
+              <a:t>По сравнению  с конкурентами наше программное решение имеет ряд преимуществ:</a:t>
+            </a:r>
+            <a:endParaRPr lang="en-US" dirty="0"/>
+          </a:p>
           <a:p>
             <a:pPr marL="514350" indent="-514350">
               <a:buFont typeface="+mj-lt"/>
@@ -7058,6 +7267,53 @@
           </a:p>
         </p:txBody>
       </p:sp>
+      <p:pic>
+        <p:nvPicPr>
+          <p:cNvPr id="4098" name="Picture 2" descr="What is an User Interface? - Smartpedia - t2informatik">
+            <a:extLst>
+              <a:ext uri="{FF2B5EF4-FFF2-40B4-BE49-F238E27FC236}">
+                <a16:creationId xmlns:a16="http://schemas.microsoft.com/office/drawing/2014/main" id="{D91A3177-6DDD-4E68-9931-4D9E969585AE}"/>
+              </a:ext>
+            </a:extLst>
+          </p:cNvPr>
+          <p:cNvPicPr>
+            <a:picLocks noChangeAspect="1" noChangeArrowheads="1"/>
+          </p:cNvPicPr>
+          <p:nvPr/>
+        </p:nvPicPr>
+        <p:blipFill>
+          <a:blip r:embed="rId2">
+            <a:extLst>
+              <a:ext uri="{28A0092B-C50C-407E-A947-70E740481C1C}">
+                <a14:useLocalDpi xmlns:a14="http://schemas.microsoft.com/office/drawing/2010/main" val="0"/>
+              </a:ext>
+            </a:extLst>
+          </a:blip>
+          <a:srcRect/>
+          <a:stretch>
+            <a:fillRect/>
+          </a:stretch>
+        </p:blipFill>
+        <p:spPr bwMode="auto">
+          <a:xfrm>
+            <a:off x="4649070" y="2296206"/>
+            <a:ext cx="4307932" cy="2866733"/>
+          </a:xfrm>
+          <a:prstGeom prst="rect">
+            <a:avLst/>
+          </a:prstGeom>
+          <a:noFill/>
+          <a:extLst>
+            <a:ext uri="{909E8E84-426E-40DD-AFC4-6F175D3DCCD1}">
+              <a14:hiddenFill xmlns:a14="http://schemas.microsoft.com/office/drawing/2010/main">
+                <a:solidFill>
+                  <a:srgbClr val="FFFFFF"/>
+                </a:solidFill>
+              </a14:hiddenFill>
+            </a:ext>
+          </a:extLst>
+        </p:spPr>
+      </p:pic>
     </p:spTree>
   </p:cSld>
   <p:clrMapOvr>
@@ -7114,10 +7370,25 @@
             <p:ph idx="1"/>
           </p:nvPr>
         </p:nvSpPr>
-        <p:spPr/>
+        <p:spPr>
+          <a:xfrm>
+            <a:off x="255422" y="1642378"/>
+            <a:ext cx="4067762" cy="4195481"/>
+          </a:xfrm>
+        </p:spPr>
         <p:txBody>
           <a:bodyPr/>
           <a:lstStyle/>
+          <a:p>
+            <a:pPr marL="0" indent="0">
+              <a:buNone/>
+            </a:pPr>
+            <a:r>
+              <a:rPr lang="ru-RU" dirty="0"/>
+              <a:t>В рамках реализации проекта планируется использование следующих технологий:</a:t>
+            </a:r>
+            <a:endParaRPr lang="en-US" dirty="0"/>
+          </a:p>
           <a:p>
             <a:pPr marL="514350" indent="-514350">
               <a:buFont typeface="+mj-lt"/>
@@ -7170,17 +7441,147 @@
             </a:pPr>
             <a:r>
               <a:rPr dirty="0"/>
-              <a:t>Redis, Docker</a:t>
+              <a:t>Redis</a:t>
             </a:r>
             <a:r>
               <a:rPr lang="ru-RU" dirty="0"/>
               <a:t>.</a:t>
             </a:r>
+            <a:r>
+              <a:rPr dirty="0"/>
+              <a:t> </a:t>
+            </a:r>
+            <a:endParaRPr lang="ru-RU" dirty="0"/>
+          </a:p>
+          <a:p>
+            <a:pPr marL="514350" indent="-514350">
+              <a:buFont typeface="+mj-lt"/>
+              <a:buAutoNum type="arabicPeriod"/>
+            </a:pPr>
+            <a:r>
+              <a:rPr dirty="0"/>
+              <a:t>Docker</a:t>
+            </a:r>
+            <a:r>
+              <a:rPr lang="ru-RU" dirty="0"/>
+              <a:t>.</a:t>
+            </a:r>
             <a:endParaRPr dirty="0"/>
           </a:p>
         </p:txBody>
       </p:sp>
+      <p:pic>
+        <p:nvPicPr>
+          <p:cNvPr id="5122" name="Picture 2" descr="PHP — Википедия">
+            <a:extLst>
+              <a:ext uri="{FF2B5EF4-FFF2-40B4-BE49-F238E27FC236}">
+                <a16:creationId xmlns:a16="http://schemas.microsoft.com/office/drawing/2014/main" id="{9F2321DA-1720-4225-8B11-6836BE111660}"/>
+              </a:ext>
+            </a:extLst>
+          </p:cNvPr>
+          <p:cNvPicPr>
+            <a:picLocks noChangeAspect="1" noChangeArrowheads="1"/>
+          </p:cNvPicPr>
+          <p:nvPr/>
+        </p:nvPicPr>
+        <p:blipFill>
+          <a:blip r:embed="rId2">
+            <a:extLst>
+              <a:ext uri="{28A0092B-C50C-407E-A947-70E740481C1C}">
+                <a14:useLocalDpi xmlns:a14="http://schemas.microsoft.com/office/drawing/2010/main" val="0"/>
+              </a:ext>
+            </a:extLst>
+          </a:blip>
+          <a:srcRect/>
+          <a:stretch>
+            <a:fillRect/>
+          </a:stretch>
+        </p:blipFill>
+        <p:spPr bwMode="auto">
+          <a:xfrm>
+            <a:off x="4709629" y="2277034"/>
+            <a:ext cx="4265938" cy="2926167"/>
+          </a:xfrm>
+          <a:prstGeom prst="rect">
+            <a:avLst/>
+          </a:prstGeom>
+          <a:noFill/>
+          <a:extLst>
+            <a:ext uri="{909E8E84-426E-40DD-AFC4-6F175D3DCCD1}">
+              <a14:hiddenFill xmlns:a14="http://schemas.microsoft.com/office/drawing/2010/main">
+                <a:solidFill>
+                  <a:srgbClr val="FFFFFF"/>
+                </a:solidFill>
+              </a14:hiddenFill>
+            </a:ext>
+          </a:extLst>
+        </p:spPr>
+      </p:pic>
     </p:spTree>
+  </p:cSld>
+  <p:clrMapOvr>
+    <a:masterClrMapping/>
+  </p:clrMapOvr>
+</p:sld>
+</file>
+
+<file path=ppt/slides/slide7.xml><?xml version="1.0" encoding="utf-8"?>
+<p:sld xmlns:a="http://schemas.openxmlformats.org/drawingml/2006/main" xmlns:r="http://schemas.openxmlformats.org/officeDocument/2006/relationships" xmlns:p="http://schemas.openxmlformats.org/presentationml/2006/main">
+  <p:cSld>
+    <p:spTree>
+      <p:nvGrpSpPr>
+        <p:cNvPr id="1" name=""/>
+        <p:cNvGrpSpPr/>
+        <p:nvPr/>
+      </p:nvGrpSpPr>
+      <p:grpSpPr>
+        <a:xfrm>
+          <a:off x="0" y="0"/>
+          <a:ext cx="0" cy="0"/>
+          <a:chOff x="0" y="0"/>
+          <a:chExt cx="0" cy="0"/>
+        </a:xfrm>
+      </p:grpSpPr>
+      <p:sp>
+        <p:nvSpPr>
+          <p:cNvPr id="2" name="Заголовок 1">
+            <a:extLst>
+              <a:ext uri="{FF2B5EF4-FFF2-40B4-BE49-F238E27FC236}">
+                <a16:creationId xmlns:a16="http://schemas.microsoft.com/office/drawing/2014/main" id="{649FDDBD-7747-46A5-AC52-BD34623D4C02}"/>
+              </a:ext>
+            </a:extLst>
+          </p:cNvPr>
+          <p:cNvSpPr>
+            <a:spLocks noGrp="1"/>
+          </p:cNvSpPr>
+          <p:nvPr>
+            <p:ph type="title"/>
+          </p:nvPr>
+        </p:nvSpPr>
+        <p:spPr>
+          <a:xfrm>
+            <a:off x="1181396" y="3052850"/>
+            <a:ext cx="7055380" cy="1400530"/>
+          </a:xfrm>
+        </p:spPr>
+        <p:txBody>
+          <a:bodyPr/>
+          <a:lstStyle/>
+          <a:p>
+            <a:pPr algn="ctr"/>
+            <a:r>
+              <a:rPr lang="ru-RU" dirty="0"/>
+              <a:t>Спасибо за внимание!</a:t>
+            </a:r>
+          </a:p>
+        </p:txBody>
+      </p:sp>
+    </p:spTree>
+    <p:extLst>
+      <p:ext uri="{BB962C8B-B14F-4D97-AF65-F5344CB8AC3E}">
+        <p14:creationId xmlns:p14="http://schemas.microsoft.com/office/powerpoint/2010/main" val="2429229180"/>
+      </p:ext>
+    </p:extLst>
   </p:cSld>
   <p:clrMapOvr>
     <a:masterClrMapping/>
